--- a/web/showcase/pptx/flagships/default/linkedin-carousel.pptx
+++ b/web/showcase/pptx/flagships/default/linkedin-carousel.pptx
@@ -8094,7 +8094,7 @@
         <p:spPr>
           <a:xfrm>
             <a:off x="1204148" y="1982568"/>
-            <a:ext cx="3756406" cy="1837831"/>
+            <a:ext cx="3865682" cy="1837831"/>
           </a:xfrm>
           <a:prstGeom prst="rect">
             <a:avLst/>
@@ -8119,7 +8119,7 @@
               <a:defRPr/>
             </a:pPr>
             <a:r>
-              <a:rPr lang="en-US" sz="15644" b="false" i="false" u="none" strike="noStrike" kern="0">
+              <a:rPr lang="en-US" sz="15644" b="true" i="false" u="none" strike="noStrike" kern="0">
                 <a:solidFill>
                   <a:srgbClr val="F5F7FC"/>
                 </a:solidFill>
@@ -8139,8 +8139,8 @@
         </p:nvSpPr>
         <p:spPr>
           <a:xfrm>
-            <a:off x="1204148" y="3833480"/>
-            <a:ext cx="11153428" cy="1837831"/>
+            <a:off x="1204148" y="3940814"/>
+            <a:ext cx="12365403" cy="1837831"/>
           </a:xfrm>
           <a:prstGeom prst="rect">
             <a:avLst/>
@@ -8165,7 +8165,7 @@
               <a:defRPr/>
             </a:pPr>
             <a:r>
-              <a:rPr lang="en-US" sz="15644" b="false" i="false" u="none" strike="noStrike" kern="0">
+              <a:rPr lang="en-US" sz="15644" b="true" i="false" u="none" strike="noStrike" kern="0">
                 <a:solidFill>
                   <a:srgbClr val="F5F7FC"/>
                 </a:solidFill>
@@ -8185,8 +8185,8 @@
         </p:nvSpPr>
         <p:spPr>
           <a:xfrm>
-            <a:off x="1204148" y="5684393"/>
-            <a:ext cx="11483244" cy="1837831"/>
+            <a:off x="1204148" y="5899060"/>
+            <a:ext cx="12365403" cy="1837831"/>
           </a:xfrm>
           <a:prstGeom prst="rect">
             <a:avLst/>
@@ -8211,7 +8211,7 @@
               <a:defRPr/>
             </a:pPr>
             <a:r>
-              <a:rPr lang="en-US" sz="15644" b="false" i="false" u="none" strike="noStrike" kern="0">
+              <a:rPr lang="en-US" sz="15644" b="true" i="false" u="none" strike="noStrike" kern="0">
                 <a:solidFill>
                   <a:srgbClr val="F5F7FC"/>
                 </a:solidFill>
@@ -8231,7 +8231,7 @@
         </p:nvSpPr>
         <p:spPr>
           <a:xfrm>
-            <a:off x="1204148" y="8915011"/>
+            <a:off x="1204148" y="9129678"/>
             <a:ext cx="2408296" cy="105363"/>
           </a:xfrm>
           <a:prstGeom prst="rect">
@@ -8253,7 +8253,7 @@
         </p:nvSpPr>
         <p:spPr>
           <a:xfrm>
-            <a:off x="1204148" y="9928325"/>
+            <a:off x="1204148" y="10142992"/>
             <a:ext cx="13086146" cy="556919"/>
           </a:xfrm>
           <a:prstGeom prst="rect">
@@ -8299,7 +8299,7 @@
         </p:nvSpPr>
         <p:spPr>
           <a:xfrm>
-            <a:off x="1204148" y="10503658"/>
+            <a:off x="1204148" y="10775170"/>
             <a:ext cx="12919973" cy="556919"/>
           </a:xfrm>
           <a:prstGeom prst="rect">
@@ -8345,7 +8345,7 @@
         </p:nvSpPr>
         <p:spPr>
           <a:xfrm>
-            <a:off x="1204148" y="11078992"/>
+            <a:off x="1204148" y="11407348"/>
             <a:ext cx="13018111" cy="556919"/>
           </a:xfrm>
           <a:prstGeom prst="rect">
@@ -8391,7 +8391,7 @@
         </p:nvSpPr>
         <p:spPr>
           <a:xfrm>
-            <a:off x="1204148" y="11654325"/>
+            <a:off x="1204148" y="12039526"/>
             <a:ext cx="12885053" cy="556919"/>
           </a:xfrm>
           <a:prstGeom prst="rect">
@@ -8437,7 +8437,7 @@
         </p:nvSpPr>
         <p:spPr>
           <a:xfrm>
-            <a:off x="1204148" y="12229659"/>
+            <a:off x="1204148" y="12671703"/>
             <a:ext cx="5088194" cy="556919"/>
           </a:xfrm>
           <a:prstGeom prst="rect">
@@ -8483,7 +8483,7 @@
         </p:nvSpPr>
         <p:spPr>
           <a:xfrm>
-            <a:off x="1204148" y="13742233"/>
+            <a:off x="1204148" y="14184278"/>
             <a:ext cx="4475417" cy="2101239"/>
           </a:xfrm>
           <a:prstGeom prst="roundRect">
@@ -8509,7 +8509,7 @@
         </p:nvSpPr>
         <p:spPr>
           <a:xfrm>
-            <a:off x="2598953" y="13889180"/>
+            <a:off x="2598953" y="14331225"/>
             <a:ext cx="1687077" cy="779686"/>
           </a:xfrm>
           <a:prstGeom prst="rect">
@@ -8535,7 +8535,7 @@
               <a:defRPr/>
             </a:pPr>
             <a:r>
-              <a:rPr lang="en-US" sz="6637" b="false" i="false" u="none" strike="noStrike" kern="0">
+              <a:rPr lang="en-US" sz="6637" b="true" i="false" u="none" strike="noStrike" kern="0">
                 <a:solidFill>
                   <a:srgbClr val="37D6A1"/>
                 </a:solidFill>
@@ -8555,7 +8555,7 @@
         </p:nvSpPr>
         <p:spPr>
           <a:xfrm>
-            <a:off x="1978817" y="14774113"/>
+            <a:off x="1978817" y="15216157"/>
             <a:ext cx="2927350" cy="319430"/>
           </a:xfrm>
           <a:prstGeom prst="rect">
@@ -8601,7 +8601,7 @@
         </p:nvSpPr>
         <p:spPr>
           <a:xfrm>
-            <a:off x="2818710" y="15196108"/>
+            <a:off x="2818710" y="15638152"/>
             <a:ext cx="1247563" cy="272107"/>
           </a:xfrm>
           <a:prstGeom prst="rect">
@@ -8647,7 +8647,7 @@
         </p:nvSpPr>
         <p:spPr>
           <a:xfrm>
-            <a:off x="5890291" y="13742233"/>
+            <a:off x="5890291" y="14184278"/>
             <a:ext cx="4475417" cy="2101239"/>
           </a:xfrm>
           <a:prstGeom prst="roundRect">
@@ -8673,7 +8673,7 @@
         </p:nvSpPr>
         <p:spPr>
           <a:xfrm>
-            <a:off x="7027168" y="13889180"/>
+            <a:off x="7027168" y="14331225"/>
             <a:ext cx="2202934" cy="779686"/>
           </a:xfrm>
           <a:prstGeom prst="rect">
@@ -8699,7 +8699,7 @@
               <a:defRPr/>
             </a:pPr>
             <a:r>
-              <a:rPr lang="en-US" sz="6637" b="false" i="false" u="none" strike="noStrike" kern="0">
+              <a:rPr lang="en-US" sz="6637" b="true" i="false" u="none" strike="noStrike" kern="0">
                 <a:solidFill>
                   <a:srgbClr val="B59FFF"/>
                 </a:solidFill>
@@ -8719,7 +8719,7 @@
         </p:nvSpPr>
         <p:spPr>
           <a:xfrm>
-            <a:off x="6664960" y="14774113"/>
+            <a:off x="6664960" y="15216157"/>
             <a:ext cx="2927350" cy="319430"/>
           </a:xfrm>
           <a:prstGeom prst="rect">
@@ -8765,7 +8765,7 @@
         </p:nvSpPr>
         <p:spPr>
           <a:xfrm>
-            <a:off x="7089422" y="15196108"/>
+            <a:off x="7089422" y="15638152"/>
             <a:ext cx="2078426" cy="272107"/>
           </a:xfrm>
           <a:prstGeom prst="rect">
@@ -8811,7 +8811,7 @@
         </p:nvSpPr>
         <p:spPr>
           <a:xfrm>
-            <a:off x="10576435" y="13742233"/>
+            <a:off x="10576435" y="14184278"/>
             <a:ext cx="4475417" cy="2101239"/>
           </a:xfrm>
           <a:prstGeom prst="roundRect">
@@ -8837,7 +8837,7 @@
         </p:nvSpPr>
         <p:spPr>
           <a:xfrm>
-            <a:off x="11596569" y="13889180"/>
+            <a:off x="11596569" y="14331225"/>
             <a:ext cx="2436419" cy="779686"/>
           </a:xfrm>
           <a:prstGeom prst="rect">
@@ -8863,7 +8863,7 @@
               <a:defRPr/>
             </a:pPr>
             <a:r>
-              <a:rPr lang="en-US" sz="6637" b="false" i="false" u="none" strike="noStrike" kern="0">
+              <a:rPr lang="en-US" sz="6637" b="true" i="false" u="none" strike="noStrike" kern="0">
                 <a:solidFill>
                   <a:srgbClr val="E6A044"/>
                 </a:solidFill>
@@ -8883,7 +8883,7 @@
         </p:nvSpPr>
         <p:spPr>
           <a:xfrm>
-            <a:off x="11838783" y="14774113"/>
+            <a:off x="11838783" y="15216157"/>
             <a:ext cx="1951990" cy="319430"/>
           </a:xfrm>
           <a:prstGeom prst="rect">
@@ -8929,7 +8929,7 @@
         </p:nvSpPr>
         <p:spPr>
           <a:xfrm>
-            <a:off x="11775565" y="15196108"/>
+            <a:off x="11775565" y="15638152"/>
             <a:ext cx="2078426" cy="272107"/>
           </a:xfrm>
           <a:prstGeom prst="rect">
@@ -8975,7 +8975,7 @@
         </p:nvSpPr>
         <p:spPr>
           <a:xfrm>
-            <a:off x="1204148" y="16714673"/>
+            <a:off x="1204148" y="17156718"/>
             <a:ext cx="10289151" cy="306305"/>
           </a:xfrm>
           <a:prstGeom prst="rect">
@@ -9115,7 +9115,7 @@
         <p:spPr>
           <a:xfrm>
             <a:off x="1204148" y="1732161"/>
-            <a:ext cx="8575618" cy="1141683"/>
+            <a:ext cx="9192744" cy="1141683"/>
           </a:xfrm>
           <a:prstGeom prst="rect">
             <a:avLst/>
@@ -9140,7 +9140,7 @@
               <a:defRPr/>
             </a:pPr>
             <a:r>
-              <a:rPr lang="en-US" sz="9718" b="false" i="false" u="none" strike="noStrike" kern="0">
+              <a:rPr lang="en-US" sz="9718" b="true" i="false" u="none" strike="noStrike" kern="0">
                 <a:solidFill>
                   <a:srgbClr val="F5F7FC"/>
                 </a:solidFill>
@@ -9160,8 +9160,8 @@
         </p:nvSpPr>
         <p:spPr>
           <a:xfrm>
-            <a:off x="1204148" y="2887306"/>
-            <a:ext cx="10563997" cy="1141683"/>
+            <a:off x="1204148" y="2964155"/>
+            <a:ext cx="11525480" cy="1141683"/>
           </a:xfrm>
           <a:prstGeom prst="rect">
             <a:avLst/>
@@ -9186,7 +9186,7 @@
               <a:defRPr/>
             </a:pPr>
             <a:r>
-              <a:rPr lang="en-US" sz="9718" b="false" i="false" u="none" strike="noStrike" kern="0">
+              <a:rPr lang="en-US" sz="9718" b="true" i="false" u="none" strike="noStrike" kern="0">
                 <a:solidFill>
                   <a:srgbClr val="F5F7FC"/>
                 </a:solidFill>
@@ -9206,12 +9206,12 @@
         </p:nvSpPr>
         <p:spPr>
           <a:xfrm>
-            <a:off x="1204148" y="4711687"/>
-            <a:ext cx="13847704" cy="3253364"/>
+            <a:off x="1204148" y="4788536"/>
+            <a:ext cx="13847704" cy="3380646"/>
           </a:xfrm>
           <a:prstGeom prst="roundRect">
             <a:avLst>
-              <a:gd name="adj" fmla="val 12029"/>
+              <a:gd name="adj" fmla="val 11576"/>
             </a:avLst>
           </a:prstGeom>
           <a:solidFill>
@@ -9230,8 +9230,8 @@
         </p:nvCxnSpPr>
         <p:spPr>
           <a:xfrm>
-            <a:off x="1204148" y="4711687"/>
-            <a:ext cx="0" cy="3253364"/>
+            <a:off x="1204148" y="4788536"/>
+            <a:ext cx="0" cy="3380646"/>
           </a:xfrm>
           <a:prstGeom prst="line">
             <a:avLst/>
@@ -9251,8 +9251,8 @@
         </p:nvSpPr>
         <p:spPr>
           <a:xfrm>
-            <a:off x="1655704" y="5140801"/>
-            <a:ext cx="6259228" cy="556919"/>
+            <a:off x="1655704" y="5217650"/>
+            <a:ext cx="6792666" cy="556919"/>
           </a:xfrm>
           <a:prstGeom prst="rect">
             <a:avLst/>
@@ -9277,7 +9277,7 @@
               <a:defRPr/>
             </a:pPr>
             <a:r>
-              <a:rPr lang="en-US" sz="4740" b="false" i="false" u="none" strike="noStrike" kern="0">
+              <a:rPr lang="en-US" sz="4740" b="true" i="false" u="none" strike="noStrike" kern="0">
                 <a:solidFill>
                   <a:srgbClr val="F5F7FC"/>
                 </a:solidFill>
@@ -9297,7 +9297,7 @@
         </p:nvSpPr>
         <p:spPr>
           <a:xfrm>
-            <a:off x="1655704" y="5821856"/>
+            <a:off x="1655704" y="5898705"/>
             <a:ext cx="8902333" cy="389843"/>
           </a:xfrm>
           <a:prstGeom prst="rect">
@@ -9343,7 +9343,7 @@
         </p:nvSpPr>
         <p:spPr>
           <a:xfrm>
-            <a:off x="1655704" y="6229479"/>
+            <a:off x="1655704" y="6348756"/>
             <a:ext cx="10846912" cy="389843"/>
           </a:xfrm>
           <a:prstGeom prst="rect">
@@ -9389,7 +9389,7 @@
         </p:nvSpPr>
         <p:spPr>
           <a:xfrm>
-            <a:off x="1655704" y="6637102"/>
+            <a:off x="1655704" y="6798806"/>
             <a:ext cx="12931834" cy="389843"/>
           </a:xfrm>
           <a:prstGeom prst="rect">
@@ -9435,7 +9435,7 @@
         </p:nvSpPr>
         <p:spPr>
           <a:xfrm>
-            <a:off x="1655704" y="7044725"/>
+            <a:off x="1655704" y="7248857"/>
             <a:ext cx="8667584" cy="389843"/>
           </a:xfrm>
           <a:prstGeom prst="rect">
@@ -9481,12 +9481,12 @@
         </p:nvSpPr>
         <p:spPr>
           <a:xfrm>
-            <a:off x="1204148" y="8416606"/>
-            <a:ext cx="13847704" cy="2845741"/>
+            <a:off x="1204148" y="8620737"/>
+            <a:ext cx="13847704" cy="2930596"/>
           </a:xfrm>
           <a:prstGeom prst="roundRect">
             <a:avLst>
-              <a:gd name="adj" fmla="val 13752"/>
+              <a:gd name="adj" fmla="val 13354"/>
             </a:avLst>
           </a:prstGeom>
           <a:solidFill>
@@ -9505,8 +9505,8 @@
         </p:nvCxnSpPr>
         <p:spPr>
           <a:xfrm>
-            <a:off x="1204148" y="8416606"/>
-            <a:ext cx="0" cy="2845741"/>
+            <a:off x="1204148" y="8620737"/>
+            <a:ext cx="0" cy="2930596"/>
           </a:xfrm>
           <a:prstGeom prst="line">
             <a:avLst/>
@@ -9526,8 +9526,8 @@
         </p:nvSpPr>
         <p:spPr>
           <a:xfrm>
-            <a:off x="1655704" y="8845720"/>
-            <a:ext cx="8400805" cy="556919"/>
+            <a:off x="1655704" y="9049852"/>
+            <a:ext cx="9035391" cy="556919"/>
           </a:xfrm>
           <a:prstGeom prst="rect">
             <a:avLst/>
@@ -9552,7 +9552,7 @@
               <a:defRPr/>
             </a:pPr>
             <a:r>
-              <a:rPr lang="en-US" sz="4740" b="false" i="false" u="none" strike="noStrike" kern="0">
+              <a:rPr lang="en-US" sz="4740" b="true" i="false" u="none" strike="noStrike" kern="0">
                 <a:solidFill>
                   <a:srgbClr val="F5F7FC"/>
                 </a:solidFill>
@@ -9572,7 +9572,7 @@
         </p:nvSpPr>
         <p:spPr>
           <a:xfrm>
-            <a:off x="1655704" y="9526776"/>
+            <a:off x="1655704" y="9730907"/>
             <a:ext cx="11385106" cy="389843"/>
           </a:xfrm>
           <a:prstGeom prst="rect">
@@ -9618,7 +9618,7 @@
         </p:nvSpPr>
         <p:spPr>
           <a:xfrm>
-            <a:off x="1655704" y="9934399"/>
+            <a:off x="1655704" y="10180957"/>
             <a:ext cx="12744288" cy="389843"/>
           </a:xfrm>
           <a:prstGeom prst="rect">
@@ -9664,7 +9664,7 @@
         </p:nvSpPr>
         <p:spPr>
           <a:xfrm>
-            <a:off x="1655704" y="10342021"/>
+            <a:off x="1655704" y="10631008"/>
             <a:ext cx="3585718" cy="389843"/>
           </a:xfrm>
           <a:prstGeom prst="rect">
@@ -9710,12 +9710,12 @@
         </p:nvSpPr>
         <p:spPr>
           <a:xfrm>
-            <a:off x="1204148" y="11713902"/>
-            <a:ext cx="13847704" cy="2438118"/>
+            <a:off x="1204148" y="12002888"/>
+            <a:ext cx="13847704" cy="2480545"/>
           </a:xfrm>
           <a:prstGeom prst="roundRect">
             <a:avLst>
-              <a:gd name="adj" fmla="val 16051"/>
+              <a:gd name="adj" fmla="val 15777"/>
             </a:avLst>
           </a:prstGeom>
           <a:solidFill>
@@ -9734,8 +9734,8 @@
         </p:nvCxnSpPr>
         <p:spPr>
           <a:xfrm>
-            <a:off x="1204148" y="11713902"/>
-            <a:ext cx="0" cy="2438118"/>
+            <a:off x="1204148" y="12002888"/>
+            <a:ext cx="0" cy="2480545"/>
           </a:xfrm>
           <a:prstGeom prst="line">
             <a:avLst/>
@@ -9755,8 +9755,8 @@
         </p:nvSpPr>
         <p:spPr>
           <a:xfrm>
-            <a:off x="1655704" y="12143016"/>
-            <a:ext cx="5622836" cy="556919"/>
+            <a:off x="1655704" y="12432003"/>
+            <a:ext cx="6057533" cy="556919"/>
           </a:xfrm>
           <a:prstGeom prst="rect">
             <a:avLst/>
@@ -9781,7 +9781,7 @@
               <a:defRPr/>
             </a:pPr>
             <a:r>
-              <a:rPr lang="en-US" sz="4740" b="false" i="false" u="none" strike="noStrike" kern="0">
+              <a:rPr lang="en-US" sz="4740" b="true" i="false" u="none" strike="noStrike" kern="0">
                 <a:solidFill>
                   <a:srgbClr val="F5F7FC"/>
                 </a:solidFill>
@@ -9801,7 +9801,7 @@
         </p:nvSpPr>
         <p:spPr>
           <a:xfrm>
-            <a:off x="1655704" y="12824072"/>
+            <a:off x="1655704" y="13113058"/>
             <a:ext cx="12813406" cy="389843"/>
           </a:xfrm>
           <a:prstGeom prst="rect">
@@ -9847,7 +9847,7 @@
         </p:nvSpPr>
         <p:spPr>
           <a:xfrm>
-            <a:off x="1655704" y="13231695"/>
+            <a:off x="1655704" y="13563108"/>
             <a:ext cx="8294178" cy="389843"/>
           </a:xfrm>
           <a:prstGeom prst="rect">
@@ -9893,12 +9893,12 @@
         </p:nvSpPr>
         <p:spPr>
           <a:xfrm>
-            <a:off x="1204148" y="14603576"/>
-            <a:ext cx="13847704" cy="2845741"/>
+            <a:off x="1204148" y="14934989"/>
+            <a:ext cx="13847704" cy="2930596"/>
           </a:xfrm>
           <a:prstGeom prst="roundRect">
             <a:avLst>
-              <a:gd name="adj" fmla="val 13752"/>
+              <a:gd name="adj" fmla="val 13354"/>
             </a:avLst>
           </a:prstGeom>
           <a:solidFill>
@@ -9917,8 +9917,8 @@
         </p:nvCxnSpPr>
         <p:spPr>
           <a:xfrm>
-            <a:off x="1204148" y="14603576"/>
-            <a:ext cx="0" cy="2845741"/>
+            <a:off x="1204148" y="14934989"/>
+            <a:ext cx="0" cy="2930596"/>
           </a:xfrm>
           <a:prstGeom prst="line">
             <a:avLst/>
@@ -9938,8 +9938,8 @@
         </p:nvSpPr>
         <p:spPr>
           <a:xfrm>
-            <a:off x="1655704" y="15032690"/>
-            <a:ext cx="7196055" cy="556919"/>
+            <a:off x="1655704" y="15364103"/>
+            <a:ext cx="7796925" cy="556919"/>
           </a:xfrm>
           <a:prstGeom prst="rect">
             <a:avLst/>
@@ -9964,7 +9964,7 @@
               <a:defRPr/>
             </a:pPr>
             <a:r>
-              <a:rPr lang="en-US" sz="4740" b="false" i="false" u="none" strike="noStrike" kern="0">
+              <a:rPr lang="en-US" sz="4740" b="true" i="false" u="none" strike="noStrike" kern="0">
                 <a:solidFill>
                   <a:srgbClr val="F5F7FC"/>
                 </a:solidFill>
@@ -9984,7 +9984,7 @@
         </p:nvSpPr>
         <p:spPr>
           <a:xfrm>
-            <a:off x="1655704" y="15713745"/>
+            <a:off x="1655704" y="16045159"/>
             <a:ext cx="11805715" cy="389843"/>
           </a:xfrm>
           <a:prstGeom prst="rect">
@@ -10030,7 +10030,7 @@
         </p:nvSpPr>
         <p:spPr>
           <a:xfrm>
-            <a:off x="1655704" y="16121368"/>
+            <a:off x="1655704" y="16495209"/>
             <a:ext cx="12323258" cy="389843"/>
           </a:xfrm>
           <a:prstGeom prst="rect">
@@ -10076,7 +10076,7 @@
         </p:nvSpPr>
         <p:spPr>
           <a:xfrm>
-            <a:off x="1655704" y="16528991"/>
+            <a:off x="1655704" y="16945259"/>
             <a:ext cx="10706147" cy="389843"/>
           </a:xfrm>
           <a:prstGeom prst="rect">
@@ -10216,7 +10216,7 @@
         <p:spPr>
           <a:xfrm>
             <a:off x="1204148" y="1882679"/>
-            <a:ext cx="9878988" cy="1141683"/>
+            <a:ext cx="10494879" cy="1141683"/>
           </a:xfrm>
           <a:prstGeom prst="rect">
             <a:avLst/>
@@ -10241,7 +10241,7 @@
               <a:defRPr/>
             </a:pPr>
             <a:r>
-              <a:rPr lang="en-US" sz="9718" b="false" i="false" u="none" strike="noStrike" kern="0">
+              <a:rPr lang="en-US" sz="9718" b="true" i="false" u="none" strike="noStrike" kern="0">
                 <a:solidFill>
                   <a:srgbClr val="F5F7FC"/>
                 </a:solidFill>
@@ -10400,7 +10400,7 @@
         </p:nvCxnSpPr>
         <p:spPr>
           <a:xfrm flipV="false">
-            <a:off x="2242350" y="10052061"/>
+            <a:off x="2242350" y="10584671"/>
             <a:ext cx="12418154" cy="0"/>
           </a:xfrm>
           <a:prstGeom prst="line">
@@ -10421,8 +10421,8 @@
         </p:nvSpPr>
         <p:spPr>
           <a:xfrm>
-            <a:off x="1595496" y="9892279"/>
-            <a:ext cx="597323" cy="260277"/>
+            <a:off x="1794181" y="10424889"/>
+            <a:ext cx="398639" cy="260277"/>
           </a:xfrm>
           <a:prstGeom prst="rect">
             <a:avLst/>
@@ -10453,7 +10453,7 @@
                 </a:solidFill>
                 <a:latin typeface="Courier New"/>
               </a:rPr>
-              <a:t>100</a:t>
+              <a:t>50</a:t>
             </a:r>
             <a:endParaRPr lang="en-US" sz="1100"/>
           </a:p>
@@ -10467,7 +10467,7 @@
         </p:nvCxnSpPr>
         <p:spPr>
           <a:xfrm flipV="false">
-            <a:off x="2242350" y="7921619"/>
+            <a:off x="2242350" y="8986840"/>
             <a:ext cx="12418154" cy="0"/>
           </a:xfrm>
           <a:prstGeom prst="line">
@@ -10488,7 +10488,7 @@
         </p:nvSpPr>
         <p:spPr>
           <a:xfrm>
-            <a:off x="1595496" y="7761837"/>
+            <a:off x="1595496" y="8827058"/>
             <a:ext cx="597323" cy="260277"/>
           </a:xfrm>
           <a:prstGeom prst="rect">
@@ -10520,7 +10520,7 @@
                 </a:solidFill>
                 <a:latin typeface="Courier New"/>
               </a:rPr>
-              <a:t>200</a:t>
+              <a:t>100</a:t>
             </a:r>
             <a:endParaRPr lang="en-US" sz="1100"/>
           </a:p>
@@ -10534,7 +10534,7 @@
         </p:nvCxnSpPr>
         <p:spPr>
           <a:xfrm flipV="false">
-            <a:off x="2242350" y="5791177"/>
+            <a:off x="2242350" y="7389009"/>
             <a:ext cx="12418154" cy="0"/>
           </a:xfrm>
           <a:prstGeom prst="line">
@@ -10555,7 +10555,7 @@
         </p:nvSpPr>
         <p:spPr>
           <a:xfrm>
-            <a:off x="1595496" y="5631396"/>
+            <a:off x="1595496" y="7229227"/>
             <a:ext cx="597323" cy="260277"/>
           </a:xfrm>
           <a:prstGeom prst="rect">
@@ -10587,36 +10587,33 @@
                 </a:solidFill>
                 <a:latin typeface="Courier New"/>
               </a:rPr>
-              <a:t>300</a:t>
+              <a:t>150</a:t>
             </a:r>
             <a:endParaRPr lang="en-US" sz="1100"/>
           </a:p>
         </p:txBody>
       </p:sp>
-      <p:sp>
-        <p:nvSpPr>
-          <p:cNvPr name="AutoShape 15" id="15"/>
-          <p:cNvSpPr/>
-          <p:nvPr/>
-        </p:nvSpPr>
-        <p:spPr>
-          <a:xfrm>
-            <a:off x="3422074" y="10817315"/>
-            <a:ext cx="1779935" cy="1365187"/>
-          </a:xfrm>
-          <a:prstGeom prst="roundRect">
-            <a:avLst>
-              <a:gd name="adj" fmla="val 4410"/>
-            </a:avLst>
-          </a:prstGeom>
-          <a:solidFill>
-            <a:srgbClr val="7C5CFC"/>
-          </a:solidFill>
-          <a:ln>
-            <a:noFill/>
-          </a:ln>
-        </p:spPr>
-      </p:sp>
+      <p:cxnSp>
+        <p:nvCxnSpPr>
+          <p:cNvPr name="Connector 15" id="15"/>
+          <p:cNvCxnSpPr/>
+          <p:nvPr/>
+        </p:nvCxnSpPr>
+        <p:spPr>
+          <a:xfrm flipV="false">
+            <a:off x="2242350" y="5791177"/>
+            <a:ext cx="12418154" cy="0"/>
+          </a:xfrm>
+          <a:prstGeom prst="line">
+            <a:avLst/>
+          </a:prstGeom>
+          <a:ln w="6350" cap="flat">
+            <a:solidFill>
+              <a:srgbClr val="E0E0E0"/>
+            </a:solidFill>
+          </a:ln>
+        </p:spPr>
+      </p:cxnSp>
       <p:sp>
         <p:nvSpPr>
           <p:cNvPr name="GraphCompose Text Line" id="16"/>
@@ -10625,8 +10622,8 @@
         </p:nvSpPr>
         <p:spPr>
           <a:xfrm>
-            <a:off x="3747598" y="10419563"/>
-            <a:ext cx="1130159" cy="295769"/>
+            <a:off x="1595496" y="5631396"/>
+            <a:ext cx="597323" cy="260277"/>
           </a:xfrm>
           <a:prstGeom prst="rect">
             <a:avLst/>
@@ -10651,13 +10648,13 @@
               <a:defRPr/>
             </a:pPr>
             <a:r>
-              <a:rPr lang="en-US" sz="2962" b="false" i="false" u="none" strike="noStrike" kern="0">
-                <a:solidFill>
-                  <a:srgbClr val="F5F7FC"/>
+              <a:rPr lang="en-US" sz="2607" b="false" i="false" u="none" strike="noStrike" kern="0">
+                <a:solidFill>
+                  <a:srgbClr val="A8B1CA"/>
                 </a:solidFill>
                 <a:latin typeface="Courier New"/>
               </a:rPr>
-              <a:t>64.08</a:t>
+              <a:t>200</a:t>
             </a:r>
             <a:endParaRPr lang="en-US" sz="1100"/>
           </a:p>
@@ -10671,12 +10668,12 @@
         </p:nvSpPr>
         <p:spPr>
           <a:xfrm>
-            <a:off x="7561459" y="5982278"/>
-            <a:ext cx="1779935" cy="6200224"/>
+            <a:off x="3422074" y="10816037"/>
+            <a:ext cx="1779935" cy="1366465"/>
           </a:xfrm>
           <a:prstGeom prst="roundRect">
             <a:avLst>
-              <a:gd name="adj" fmla="val 3383"/>
+              <a:gd name="adj" fmla="val 4406"/>
             </a:avLst>
           </a:prstGeom>
           <a:solidFill>
@@ -10689,14 +10686,38 @@
       </p:sp>
       <p:sp>
         <p:nvSpPr>
-          <p:cNvPr name="GraphCompose Text Line" id="18"/>
+          <p:cNvPr name="AutoShape 18" id="18"/>
+          <p:cNvSpPr/>
+          <p:nvPr/>
+        </p:nvSpPr>
+        <p:spPr>
+          <a:xfrm>
+            <a:off x="3396674" y="10482168"/>
+            <a:ext cx="1830735" cy="321169"/>
+          </a:xfrm>
+          <a:prstGeom prst="roundRect">
+            <a:avLst>
+              <a:gd name="adj" fmla="val 7909"/>
+            </a:avLst>
+          </a:prstGeom>
+          <a:solidFill>
+            <a:srgbClr val="141B33"/>
+          </a:solidFill>
+          <a:ln>
+            <a:noFill/>
+          </a:ln>
+        </p:spPr>
+      </p:sp>
+      <p:sp>
+        <p:nvSpPr>
+          <p:cNvPr name="GraphCompose Text Line" id="19"/>
           <p:cNvSpPr txBox="true"/>
           <p:nvPr/>
         </p:nvSpPr>
         <p:spPr>
           <a:xfrm>
-            <a:off x="7774093" y="5584525"/>
-            <a:ext cx="1355937" cy="295769"/>
+            <a:off x="3747598" y="10418284"/>
+            <a:ext cx="1130159" cy="295769"/>
           </a:xfrm>
           <a:prstGeom prst="rect">
             <a:avLst/>
@@ -10723,11 +10744,11 @@
             <a:r>
               <a:rPr lang="en-US" sz="2962" b="false" i="false" u="none" strike="noStrike" kern="0">
                 <a:solidFill>
-                  <a:srgbClr val="F5F7FC"/>
+                  <a:srgbClr val="E6A044"/>
                 </a:solidFill>
                 <a:latin typeface="Courier New"/>
               </a:rPr>
-              <a:t>291.03</a:t>
+              <a:t>42.76</a:t>
             </a:r>
             <a:endParaRPr lang="en-US" sz="1100"/>
           </a:p>
@@ -10735,18 +10756,18 @@
       </p:sp>
       <p:sp>
         <p:nvSpPr>
-          <p:cNvPr name="AutoShape 19" id="19"/>
-          <p:cNvSpPr/>
-          <p:nvPr/>
-        </p:nvSpPr>
-        <p:spPr>
-          <a:xfrm>
-            <a:off x="11700844" y="10802615"/>
-            <a:ext cx="1779935" cy="1379887"/>
+          <p:cNvPr name="AutoShape 20" id="20"/>
+          <p:cNvSpPr/>
+          <p:nvPr/>
+        </p:nvSpPr>
+        <p:spPr>
+          <a:xfrm>
+            <a:off x="7561459" y="6138865"/>
+            <a:ext cx="1779935" cy="6043637"/>
           </a:xfrm>
           <a:prstGeom prst="roundRect">
             <a:avLst>
-              <a:gd name="adj" fmla="val 4363"/>
+              <a:gd name="adj" fmla="val 3383"/>
             </a:avLst>
           </a:prstGeom>
           <a:solidFill>
@@ -10759,14 +10780,38 @@
       </p:sp>
       <p:sp>
         <p:nvSpPr>
-          <p:cNvPr name="GraphCompose Text Line" id="20"/>
+          <p:cNvPr name="AutoShape 21" id="21"/>
+          <p:cNvSpPr/>
+          <p:nvPr/>
+        </p:nvSpPr>
+        <p:spPr>
+          <a:xfrm>
+            <a:off x="7536059" y="5804997"/>
+            <a:ext cx="1830735" cy="321169"/>
+          </a:xfrm>
+          <a:prstGeom prst="roundRect">
+            <a:avLst>
+              <a:gd name="adj" fmla="val 7909"/>
+            </a:avLst>
+          </a:prstGeom>
+          <a:solidFill>
+            <a:srgbClr val="141B33"/>
+          </a:solidFill>
+          <a:ln>
+            <a:noFill/>
+          </a:ln>
+        </p:spPr>
+      </p:sp>
+      <p:sp>
+        <p:nvSpPr>
+          <p:cNvPr name="GraphCompose Text Line" id="22"/>
           <p:cNvSpPr txBox="true"/>
           <p:nvPr/>
         </p:nvSpPr>
         <p:spPr>
           <a:xfrm>
-            <a:off x="12026367" y="10404863"/>
-            <a:ext cx="1130159" cy="295769"/>
+            <a:off x="7774093" y="5741113"/>
+            <a:ext cx="1355937" cy="295769"/>
           </a:xfrm>
           <a:prstGeom prst="rect">
             <a:avLst/>
@@ -10793,11 +10838,11 @@
             <a:r>
               <a:rPr lang="en-US" sz="2962" b="false" i="false" u="none" strike="noStrike" kern="0">
                 <a:solidFill>
-                  <a:srgbClr val="F5F7FC"/>
+                  <a:srgbClr val="E6A044"/>
                 </a:solidFill>
                 <a:latin typeface="Courier New"/>
               </a:rPr>
-              <a:t>64.77</a:t>
+              <a:t>189.12</a:t>
             </a:r>
             <a:endParaRPr lang="en-US" sz="1100"/>
           </a:p>
@@ -10805,14 +10850,62 @@
       </p:sp>
       <p:sp>
         <p:nvSpPr>
-          <p:cNvPr name="GraphCompose Text Line" id="21"/>
+          <p:cNvPr name="AutoShape 23" id="23"/>
+          <p:cNvSpPr/>
+          <p:nvPr/>
+        </p:nvSpPr>
+        <p:spPr>
+          <a:xfrm>
+            <a:off x="11700844" y="10786637"/>
+            <a:ext cx="1779935" cy="1395865"/>
+          </a:xfrm>
+          <a:prstGeom prst="roundRect">
+            <a:avLst>
+              <a:gd name="adj" fmla="val 4313"/>
+            </a:avLst>
+          </a:prstGeom>
+          <a:solidFill>
+            <a:srgbClr val="7C5CFC"/>
+          </a:solidFill>
+          <a:ln>
+            <a:noFill/>
+          </a:ln>
+        </p:spPr>
+      </p:sp>
+      <p:sp>
+        <p:nvSpPr>
+          <p:cNvPr name="AutoShape 24" id="24"/>
+          <p:cNvSpPr/>
+          <p:nvPr/>
+        </p:nvSpPr>
+        <p:spPr>
+          <a:xfrm>
+            <a:off x="11675444" y="10452768"/>
+            <a:ext cx="1830735" cy="321169"/>
+          </a:xfrm>
+          <a:prstGeom prst="roundRect">
+            <a:avLst>
+              <a:gd name="adj" fmla="val 7909"/>
+            </a:avLst>
+          </a:prstGeom>
+          <a:solidFill>
+            <a:srgbClr val="141B33"/>
+          </a:solidFill>
+          <a:ln>
+            <a:noFill/>
+          </a:ln>
+        </p:spPr>
+      </p:sp>
+      <p:sp>
+        <p:nvSpPr>
+          <p:cNvPr name="GraphCompose Text Line" id="25"/>
           <p:cNvSpPr txBox="true"/>
           <p:nvPr/>
         </p:nvSpPr>
         <p:spPr>
           <a:xfrm>
-            <a:off x="3119935" y="12165909"/>
-            <a:ext cx="2385483" cy="260277"/>
+            <a:off x="12026367" y="10388884"/>
+            <a:ext cx="1130159" cy="295769"/>
           </a:xfrm>
           <a:prstGeom prst="rect">
             <a:avLst/>
@@ -10837,13 +10930,13 @@
               <a:defRPr/>
             </a:pPr>
             <a:r>
-              <a:rPr lang="en-US" sz="2607" b="false" i="false" u="none" strike="noStrike" kern="0">
-                <a:solidFill>
-                  <a:srgbClr val="A8B1CA"/>
+              <a:rPr lang="en-US" sz="2962" b="false" i="false" u="none" strike="noStrike" kern="0">
+                <a:solidFill>
+                  <a:srgbClr val="E6A044"/>
                 </a:solidFill>
                 <a:latin typeface="Courier New"/>
               </a:rPr>
-              <a:t>GraphCompose</a:t>
+              <a:t>43.68</a:t>
             </a:r>
             <a:endParaRPr lang="en-US" sz="1100"/>
           </a:p>
@@ -10851,14 +10944,14 @@
       </p:sp>
       <p:sp>
         <p:nvSpPr>
-          <p:cNvPr name="GraphCompose Text Line" id="22"/>
+          <p:cNvPr name="GraphCompose Text Line" id="26"/>
           <p:cNvSpPr txBox="true"/>
           <p:nvPr/>
         </p:nvSpPr>
         <p:spPr>
           <a:xfrm>
-            <a:off x="7756031" y="12165909"/>
-            <a:ext cx="1392061" cy="260277"/>
+            <a:off x="3119935" y="12165909"/>
+            <a:ext cx="2385483" cy="260277"/>
           </a:xfrm>
           <a:prstGeom prst="rect">
             <a:avLst/>
@@ -10889,7 +10982,7 @@
                 </a:solidFill>
                 <a:latin typeface="Courier New"/>
               </a:rPr>
-              <a:t>iText 9</a:t>
+              <a:t>GraphCompose</a:t>
             </a:r>
             <a:endParaRPr lang="en-US" sz="1100"/>
           </a:p>
@@ -10897,14 +10990,14 @@
       </p:sp>
       <p:sp>
         <p:nvSpPr>
-          <p:cNvPr name="GraphCompose Text Line" id="23"/>
+          <p:cNvPr name="GraphCompose Text Line" id="27"/>
           <p:cNvSpPr txBox="true"/>
           <p:nvPr/>
         </p:nvSpPr>
         <p:spPr>
           <a:xfrm>
-            <a:off x="11299362" y="12165909"/>
-            <a:ext cx="2584168" cy="260277"/>
+            <a:off x="7756031" y="12165909"/>
+            <a:ext cx="1392061" cy="260277"/>
           </a:xfrm>
           <a:prstGeom prst="rect">
             <a:avLst/>
@@ -10935,7 +11028,7 @@
                 </a:solidFill>
                 <a:latin typeface="Courier New"/>
               </a:rPr>
-              <a:t>JasperReports</a:t>
+              <a:t>iText 9</a:t>
             </a:r>
             <a:endParaRPr lang="en-US" sz="1100"/>
           </a:p>
@@ -10943,59 +11036,14 @@
       </p:sp>
       <p:sp>
         <p:nvSpPr>
-          <p:cNvPr name="AutoShape 24" id="24"/>
-          <p:cNvSpPr/>
-          <p:nvPr/>
-        </p:nvSpPr>
-        <p:spPr>
-          <a:xfrm>
-            <a:off x="1204148" y="13487001"/>
-            <a:ext cx="3613889" cy="1977813"/>
-          </a:xfrm>
-          <a:prstGeom prst="roundRect">
-            <a:avLst>
-              <a:gd name="adj" fmla="val 10654"/>
-            </a:avLst>
-          </a:prstGeom>
-          <a:solidFill>
-            <a:srgbClr val="1B2240"/>
-          </a:solidFill>
-          <a:ln>
-            <a:noFill/>
-          </a:ln>
-        </p:spPr>
-      </p:sp>
-      <p:cxnSp>
-        <p:nvCxnSpPr>
-          <p:cNvPr name="Connector 25" id="25"/>
-          <p:cNvCxnSpPr/>
-          <p:nvPr/>
-        </p:nvCxnSpPr>
-        <p:spPr>
-          <a:xfrm>
-            <a:off x="1204148" y="13487001"/>
-            <a:ext cx="3613889" cy="0"/>
-          </a:xfrm>
-          <a:prstGeom prst="line">
-            <a:avLst/>
-          </a:prstGeom>
-          <a:ln w="45156">
-            <a:solidFill>
-              <a:srgbClr val="B59FFF"/>
-            </a:solidFill>
-          </a:ln>
-        </p:spPr>
-      </p:cxnSp>
-      <p:sp>
-        <p:nvSpPr>
-          <p:cNvPr name="GraphCompose Text Line" id="26"/>
+          <p:cNvPr name="GraphCompose Text Line" id="28"/>
           <p:cNvSpPr txBox="true"/>
           <p:nvPr/>
         </p:nvSpPr>
         <p:spPr>
           <a:xfrm>
-            <a:off x="1565393" y="13667842"/>
-            <a:ext cx="1821942" cy="891070"/>
+            <a:off x="11299362" y="12165909"/>
+            <a:ext cx="2584168" cy="260277"/>
           </a:xfrm>
           <a:prstGeom prst="rect">
             <a:avLst/>
@@ -11020,13 +11068,13 @@
               <a:defRPr/>
             </a:pPr>
             <a:r>
-              <a:rPr lang="en-US" sz="7585" b="false" i="false" u="none" strike="noStrike" kern="0">
-                <a:solidFill>
-                  <a:srgbClr val="B59FFF"/>
-                </a:solidFill>
-                <a:latin typeface="Arial"/>
+              <a:rPr lang="en-US" sz="2607" b="false" i="false" u="none" strike="noStrike" kern="0">
+                <a:solidFill>
+                  <a:srgbClr val="A8B1CA"/>
+                </a:solidFill>
+                <a:latin typeface="Courier New"/>
               </a:rPr>
-              <a:t>4.5x</a:t>
+              <a:t>JasperReports</a:t>
             </a:r>
             <a:endParaRPr lang="en-US" sz="1100"/>
           </a:p>
@@ -11034,14 +11082,59 @@
       </p:sp>
       <p:sp>
         <p:nvSpPr>
-          <p:cNvPr name="GraphCompose Text Line" id="27"/>
+          <p:cNvPr name="AutoShape 29" id="29"/>
+          <p:cNvSpPr/>
+          <p:nvPr/>
+        </p:nvSpPr>
+        <p:spPr>
+          <a:xfrm>
+            <a:off x="1204148" y="13487001"/>
+            <a:ext cx="3613889" cy="1977813"/>
+          </a:xfrm>
+          <a:prstGeom prst="roundRect">
+            <a:avLst>
+              <a:gd name="adj" fmla="val 10654"/>
+            </a:avLst>
+          </a:prstGeom>
+          <a:solidFill>
+            <a:srgbClr val="1B2240"/>
+          </a:solidFill>
+          <a:ln>
+            <a:noFill/>
+          </a:ln>
+        </p:spPr>
+      </p:sp>
+      <p:cxnSp>
+        <p:nvCxnSpPr>
+          <p:cNvPr name="Connector 30" id="30"/>
+          <p:cNvCxnSpPr/>
+          <p:nvPr/>
+        </p:nvCxnSpPr>
+        <p:spPr>
+          <a:xfrm>
+            <a:off x="1204148" y="13487001"/>
+            <a:ext cx="3613889" cy="0"/>
+          </a:xfrm>
+          <a:prstGeom prst="line">
+            <a:avLst/>
+          </a:prstGeom>
+          <a:ln w="45156">
+            <a:solidFill>
+              <a:srgbClr val="B59FFF"/>
+            </a:solidFill>
+          </a:ln>
+        </p:spPr>
+      </p:cxnSp>
+      <p:sp>
+        <p:nvSpPr>
+          <p:cNvPr name="GraphCompose Text Line" id="31"/>
           <p:cNvSpPr txBox="true"/>
           <p:nvPr/>
         </p:nvSpPr>
         <p:spPr>
           <a:xfrm>
-            <a:off x="1565393" y="14701767"/>
-            <a:ext cx="2892671" cy="334151"/>
+            <a:off x="1565393" y="13667842"/>
+            <a:ext cx="1875888" cy="891070"/>
           </a:xfrm>
           <a:prstGeom prst="rect">
             <a:avLst/>
@@ -11066,13 +11159,13 @@
               <a:defRPr/>
             </a:pPr>
             <a:r>
-              <a:rPr lang="en-US" sz="2844" b="false" i="false" u="none" strike="noStrike" kern="0">
-                <a:solidFill>
-                  <a:srgbClr val="A8B1CA"/>
+              <a:rPr lang="en-US" sz="7585" b="true" i="false" u="none" strike="noStrike" kern="0">
+                <a:solidFill>
+                  <a:srgbClr val="B59FFF"/>
                 </a:solidFill>
                 <a:latin typeface="Arial"/>
               </a:rPr>
-              <a:t>faster than iText 9</a:t>
+              <a:t>4.4x</a:t>
             </a:r>
             <a:endParaRPr lang="en-US" sz="1100"/>
           </a:p>
@@ -11080,59 +11173,14 @@
       </p:sp>
       <p:sp>
         <p:nvSpPr>
-          <p:cNvPr name="AutoShape 28" id="28"/>
-          <p:cNvSpPr/>
-          <p:nvPr/>
-        </p:nvSpPr>
-        <p:spPr>
-          <a:xfrm>
-            <a:off x="5890291" y="13487001"/>
-            <a:ext cx="3694086" cy="1977813"/>
-          </a:xfrm>
-          <a:prstGeom prst="roundRect">
-            <a:avLst>
-              <a:gd name="adj" fmla="val 10654"/>
-            </a:avLst>
-          </a:prstGeom>
-          <a:solidFill>
-            <a:srgbClr val="1B2240"/>
-          </a:solidFill>
-          <a:ln>
-            <a:noFill/>
-          </a:ln>
-        </p:spPr>
-      </p:sp>
-      <p:cxnSp>
-        <p:nvCxnSpPr>
-          <p:cNvPr name="Connector 29" id="29"/>
-          <p:cNvCxnSpPr/>
-          <p:nvPr/>
-        </p:nvCxnSpPr>
-        <p:spPr>
-          <a:xfrm>
-            <a:off x="5890291" y="13487001"/>
-            <a:ext cx="3694086" cy="0"/>
-          </a:xfrm>
-          <a:prstGeom prst="line">
-            <a:avLst/>
-          </a:prstGeom>
-          <a:ln w="45156">
-            <a:solidFill>
-              <a:srgbClr val="37D6A1"/>
-            </a:solidFill>
-          </a:ln>
-        </p:spPr>
-      </p:cxnSp>
-      <p:sp>
-        <p:nvSpPr>
-          <p:cNvPr name="GraphCompose Text Line" id="30"/>
+          <p:cNvPr name="GraphCompose Text Line" id="32"/>
           <p:cNvSpPr txBox="true"/>
           <p:nvPr/>
         </p:nvSpPr>
         <p:spPr>
           <a:xfrm>
-            <a:off x="6251536" y="13667842"/>
-            <a:ext cx="1821942" cy="891070"/>
+            <a:off x="1565393" y="14701767"/>
+            <a:ext cx="2892671" cy="334151"/>
           </a:xfrm>
           <a:prstGeom prst="rect">
             <a:avLst/>
@@ -11157,13 +11205,13 @@
               <a:defRPr/>
             </a:pPr>
             <a:r>
-              <a:rPr lang="en-US" sz="7585" b="false" i="false" u="none" strike="noStrike" kern="0">
-                <a:solidFill>
-                  <a:srgbClr val="37D6A1"/>
+              <a:rPr lang="en-US" sz="2844" b="false" i="false" u="none" strike="noStrike" kern="0">
+                <a:solidFill>
+                  <a:srgbClr val="A8B1CA"/>
                 </a:solidFill>
                 <a:latin typeface="Arial"/>
               </a:rPr>
-              <a:t>3.6x</a:t>
+              <a:t>faster than iText 9</a:t>
             </a:r>
             <a:endParaRPr lang="en-US" sz="1100"/>
           </a:p>
@@ -11171,14 +11219,59 @@
       </p:sp>
       <p:sp>
         <p:nvSpPr>
-          <p:cNvPr name="GraphCompose Text Line" id="31"/>
+          <p:cNvPr name="AutoShape 33" id="33"/>
+          <p:cNvSpPr/>
+          <p:nvPr/>
+        </p:nvSpPr>
+        <p:spPr>
+          <a:xfrm>
+            <a:off x="5890291" y="13487001"/>
+            <a:ext cx="3694086" cy="1977813"/>
+          </a:xfrm>
+          <a:prstGeom prst="roundRect">
+            <a:avLst>
+              <a:gd name="adj" fmla="val 10654"/>
+            </a:avLst>
+          </a:prstGeom>
+          <a:solidFill>
+            <a:srgbClr val="1B2240"/>
+          </a:solidFill>
+          <a:ln>
+            <a:noFill/>
+          </a:ln>
+        </p:spPr>
+      </p:sp>
+      <p:cxnSp>
+        <p:nvCxnSpPr>
+          <p:cNvPr name="Connector 34" id="34"/>
+          <p:cNvCxnSpPr/>
+          <p:nvPr/>
+        </p:nvCxnSpPr>
+        <p:spPr>
+          <a:xfrm>
+            <a:off x="5890291" y="13487001"/>
+            <a:ext cx="3694086" cy="0"/>
+          </a:xfrm>
+          <a:prstGeom prst="line">
+            <a:avLst/>
+          </a:prstGeom>
+          <a:ln w="45156">
+            <a:solidFill>
+              <a:srgbClr val="37D6A1"/>
+            </a:solidFill>
+          </a:ln>
+        </p:spPr>
+      </p:cxnSp>
+      <p:sp>
+        <p:nvSpPr>
+          <p:cNvPr name="GraphCompose Text Line" id="35"/>
           <p:cNvSpPr txBox="true"/>
           <p:nvPr/>
         </p:nvSpPr>
         <p:spPr>
           <a:xfrm>
-            <a:off x="6251536" y="14701767"/>
-            <a:ext cx="2972867" cy="334151"/>
+            <a:off x="6251536" y="13667842"/>
+            <a:ext cx="1875888" cy="891070"/>
           </a:xfrm>
           <a:prstGeom prst="rect">
             <a:avLst/>
@@ -11203,13 +11296,13 @@
               <a:defRPr/>
             </a:pPr>
             <a:r>
-              <a:rPr lang="en-US" sz="2844" b="false" i="false" u="none" strike="noStrike" kern="0">
-                <a:solidFill>
-                  <a:srgbClr val="A8B1CA"/>
+              <a:rPr lang="en-US" sz="7585" b="true" i="false" u="none" strike="noStrike" kern="0">
+                <a:solidFill>
+                  <a:srgbClr val="37D6A1"/>
                 </a:solidFill>
                 <a:latin typeface="Arial"/>
               </a:rPr>
-              <a:t>lighter than iText 9</a:t>
+              <a:t>3.5x</a:t>
             </a:r>
             <a:endParaRPr lang="en-US" sz="1100"/>
           </a:p>
@@ -11217,59 +11310,14 @@
       </p:sp>
       <p:sp>
         <p:nvSpPr>
-          <p:cNvPr name="AutoShape 32" id="32"/>
-          <p:cNvSpPr/>
-          <p:nvPr/>
-        </p:nvSpPr>
-        <p:spPr>
-          <a:xfrm>
-            <a:off x="10576435" y="13487001"/>
-            <a:ext cx="3694086" cy="1977813"/>
-          </a:xfrm>
-          <a:prstGeom prst="roundRect">
-            <a:avLst>
-              <a:gd name="adj" fmla="val 10654"/>
-            </a:avLst>
-          </a:prstGeom>
-          <a:solidFill>
-            <a:srgbClr val="1B2240"/>
-          </a:solidFill>
-          <a:ln>
-            <a:noFill/>
-          </a:ln>
-        </p:spPr>
-      </p:sp>
-      <p:cxnSp>
-        <p:nvCxnSpPr>
-          <p:cNvPr name="Connector 33" id="33"/>
-          <p:cNvCxnSpPr/>
-          <p:nvPr/>
-        </p:nvCxnSpPr>
-        <p:spPr>
-          <a:xfrm>
-            <a:off x="10576435" y="13487001"/>
-            <a:ext cx="3694086" cy="0"/>
-          </a:xfrm>
-          <a:prstGeom prst="line">
-            <a:avLst/>
-          </a:prstGeom>
-          <a:ln w="45156">
-            <a:solidFill>
-              <a:srgbClr val="E6A044"/>
-            </a:solidFill>
-          </a:ln>
-        </p:spPr>
-      </p:cxnSp>
-      <p:sp>
-        <p:nvSpPr>
-          <p:cNvPr name="GraphCompose Text Line" id="34"/>
+          <p:cNvPr name="GraphCompose Text Line" id="36"/>
           <p:cNvSpPr txBox="true"/>
           <p:nvPr/>
         </p:nvSpPr>
         <p:spPr>
           <a:xfrm>
-            <a:off x="10937679" y="13667842"/>
-            <a:ext cx="1821942" cy="891070"/>
+            <a:off x="6251536" y="14701767"/>
+            <a:ext cx="2972867" cy="334151"/>
           </a:xfrm>
           <a:prstGeom prst="rect">
             <a:avLst/>
@@ -11294,13 +11342,13 @@
               <a:defRPr/>
             </a:pPr>
             <a:r>
-              <a:rPr lang="en-US" sz="7585" b="false" i="false" u="none" strike="noStrike" kern="0">
-                <a:solidFill>
-                  <a:srgbClr val="E6A044"/>
+              <a:rPr lang="en-US" sz="2844" b="false" i="false" u="none" strike="noStrike" kern="0">
+                <a:solidFill>
+                  <a:srgbClr val="A8B1CA"/>
                 </a:solidFill>
                 <a:latin typeface="Arial"/>
               </a:rPr>
-              <a:t>2.7x</a:t>
+              <a:t>lighter than iText 9</a:t>
             </a:r>
             <a:endParaRPr lang="en-US" sz="1100"/>
           </a:p>
@@ -11308,14 +11356,59 @@
       </p:sp>
       <p:sp>
         <p:nvSpPr>
-          <p:cNvPr name="GraphCompose Text Line" id="35"/>
+          <p:cNvPr name="AutoShape 37" id="37"/>
+          <p:cNvSpPr/>
+          <p:nvPr/>
+        </p:nvSpPr>
+        <p:spPr>
+          <a:xfrm>
+            <a:off x="10576435" y="13487001"/>
+            <a:ext cx="3694086" cy="1977813"/>
+          </a:xfrm>
+          <a:prstGeom prst="roundRect">
+            <a:avLst>
+              <a:gd name="adj" fmla="val 10654"/>
+            </a:avLst>
+          </a:prstGeom>
+          <a:solidFill>
+            <a:srgbClr val="1B2240"/>
+          </a:solidFill>
+          <a:ln>
+            <a:noFill/>
+          </a:ln>
+        </p:spPr>
+      </p:sp>
+      <p:cxnSp>
+        <p:nvCxnSpPr>
+          <p:cNvPr name="Connector 38" id="38"/>
+          <p:cNvCxnSpPr/>
+          <p:nvPr/>
+        </p:nvCxnSpPr>
+        <p:spPr>
+          <a:xfrm>
+            <a:off x="10576435" y="13487001"/>
+            <a:ext cx="3694086" cy="0"/>
+          </a:xfrm>
+          <a:prstGeom prst="line">
+            <a:avLst/>
+          </a:prstGeom>
+          <a:ln w="45156">
+            <a:solidFill>
+              <a:srgbClr val="E6A044"/>
+            </a:solidFill>
+          </a:ln>
+        </p:spPr>
+      </p:cxnSp>
+      <p:sp>
+        <p:nvSpPr>
+          <p:cNvPr name="GraphCompose Text Line" id="39"/>
           <p:cNvSpPr txBox="true"/>
           <p:nvPr/>
         </p:nvSpPr>
         <p:spPr>
           <a:xfrm>
-            <a:off x="10937679" y="14701767"/>
-            <a:ext cx="2972867" cy="334151"/>
+            <a:off x="10937679" y="13667842"/>
+            <a:ext cx="1875888" cy="891070"/>
           </a:xfrm>
           <a:prstGeom prst="rect">
             <a:avLst/>
@@ -11340,13 +11433,13 @@
               <a:defRPr/>
             </a:pPr>
             <a:r>
-              <a:rPr lang="en-US" sz="2844" b="false" i="false" u="none" strike="noStrike" kern="0">
-                <a:solidFill>
-                  <a:srgbClr val="A8B1CA"/>
+              <a:rPr lang="en-US" sz="7585" b="true" i="false" u="none" strike="noStrike" kern="0">
+                <a:solidFill>
+                  <a:srgbClr val="E6A044"/>
                 </a:solidFill>
                 <a:latin typeface="Arial"/>
               </a:rPr>
-              <a:t>lighter than Jasper</a:t>
+              <a:t>2.7x</a:t>
             </a:r>
             <a:endParaRPr lang="en-US" sz="1100"/>
           </a:p>
@@ -11354,14 +11447,14 @@
       </p:sp>
       <p:sp>
         <p:nvSpPr>
-          <p:cNvPr name="GraphCompose Text Line" id="36"/>
+          <p:cNvPr name="GraphCompose Text Line" id="40"/>
           <p:cNvSpPr txBox="true"/>
           <p:nvPr/>
         </p:nvSpPr>
         <p:spPr>
           <a:xfrm>
-            <a:off x="1204148" y="16095186"/>
-            <a:ext cx="13363461" cy="306305"/>
+            <a:off x="10937679" y="14701767"/>
+            <a:ext cx="2972867" cy="334151"/>
           </a:xfrm>
           <a:prstGeom prst="rect">
             <a:avLst/>
@@ -11386,13 +11479,13 @@
               <a:defRPr/>
             </a:pPr>
             <a:r>
-              <a:rPr lang="en-US" sz="2607" b="false" i="false" u="none" strike="noStrike" kern="0">
-                <a:solidFill>
-                  <a:srgbClr val="828BAA"/>
+              <a:rPr lang="en-US" sz="2844" b="false" i="false" u="none" strike="noStrike" kern="0">
+                <a:solidFill>
+                  <a:srgbClr val="A8B1CA"/>
                 </a:solidFill>
                 <a:latin typeface="Arial"/>
               </a:rPr>
-              <a:t>One machine, single run, 2026-07-26. Read the ratios rather than the timings: both libraries</a:t>
+              <a:t>lighter than Jasper</a:t>
             </a:r>
             <a:endParaRPr lang="en-US" sz="1100"/>
           </a:p>
@@ -11400,14 +11493,14 @@
       </p:sp>
       <p:sp>
         <p:nvSpPr>
-          <p:cNvPr name="GraphCompose Text Line" id="37"/>
+          <p:cNvPr name="GraphCompose Text Line" id="41"/>
           <p:cNvSpPr txBox="true"/>
           <p:nvPr/>
         </p:nvSpPr>
         <p:spPr>
           <a:xfrm>
-            <a:off x="1204148" y="16419271"/>
-            <a:ext cx="13142259" cy="306305"/>
+            <a:off x="1204148" y="16095186"/>
+            <a:ext cx="13363461" cy="306305"/>
           </a:xfrm>
           <a:prstGeom prst="rect">
             <a:avLst/>
@@ -11438,6 +11531,52 @@
                 </a:solidFill>
                 <a:latin typeface="Arial"/>
               </a:rPr>
+              <a:t>One machine, single run, 2026-08-04. Read the ratios rather than the timings: both libraries</a:t>
+            </a:r>
+            <a:endParaRPr lang="en-US" sz="1100"/>
+          </a:p>
+        </p:txBody>
+      </p:sp>
+      <p:sp>
+        <p:nvSpPr>
+          <p:cNvPr name="GraphCompose Text Line" id="42"/>
+          <p:cNvSpPr txBox="true"/>
+          <p:nvPr/>
+        </p:nvSpPr>
+        <p:spPr>
+          <a:xfrm>
+            <a:off x="1204148" y="16446647"/>
+            <a:ext cx="13142259" cy="306305"/>
+          </a:xfrm>
+          <a:prstGeom prst="rect">
+            <a:avLst/>
+          </a:prstGeom>
+        </p:spPr>
+        <p:txBody>
+          <a:bodyPr anchor="t" rtlCol="false" wrap="none" tIns="0" rIns="0" bIns="0" lIns="0">
+            <a:noAutofit/>
+          </a:bodyPr>
+          <a:lstStyle/>
+          <a:p>
+            <a:pPr algn="l">
+              <a:lnSpc>
+                <a:spcPct val="100000"/>
+              </a:lnSpc>
+              <a:spcBef>
+                <a:spcPct val="0"/>
+              </a:spcBef>
+              <a:spcAft>
+                <a:spcPct val="0"/>
+              </a:spcAft>
+              <a:defRPr/>
+            </a:pPr>
+            <a:r>
+              <a:rPr lang="en-US" sz="2607" b="false" i="false" u="none" strike="noStrike" kern="0">
+                <a:solidFill>
+                  <a:srgbClr val="828BAA"/>
+                </a:solidFill>
+                <a:latin typeface="Arial"/>
+              </a:rPr>
               <a:t>are measured in the same run, so their proportions survive a change of machine while the</a:t>
             </a:r>
             <a:endParaRPr lang="en-US" sz="1100"/>
@@ -11446,13 +11585,13 @@
       </p:sp>
       <p:sp>
         <p:nvSpPr>
-          <p:cNvPr name="GraphCompose Text Line" id="38"/>
+          <p:cNvPr name="GraphCompose Text Line" id="43"/>
           <p:cNvSpPr txBox="true"/>
           <p:nvPr/>
         </p:nvSpPr>
         <p:spPr>
           <a:xfrm>
-            <a:off x="1204148" y="16743356"/>
+            <a:off x="1204148" y="16798107"/>
             <a:ext cx="9258309" cy="306305"/>
           </a:xfrm>
           <a:prstGeom prst="rect">
@@ -11592,7 +11731,7 @@
         <p:spPr>
           <a:xfrm>
             <a:off x="1204148" y="1732161"/>
-            <a:ext cx="8782972" cy="1141683"/>
+            <a:ext cx="9329745" cy="1141683"/>
           </a:xfrm>
           <a:prstGeom prst="rect">
             <a:avLst/>
@@ -11617,7 +11756,7 @@
               <a:defRPr/>
             </a:pPr>
             <a:r>
-              <a:rPr lang="en-US" sz="9718" b="false" i="false" u="none" strike="noStrike" kern="0">
+              <a:rPr lang="en-US" sz="9718" b="true" i="false" u="none" strike="noStrike" kern="0">
                 <a:solidFill>
                   <a:srgbClr val="F5F7FC"/>
                 </a:solidFill>
@@ -11637,8 +11776,8 @@
         </p:nvSpPr>
         <p:spPr>
           <a:xfrm>
-            <a:off x="1204148" y="2887306"/>
-            <a:ext cx="4460622" cy="1141683"/>
+            <a:off x="1204148" y="2964155"/>
+            <a:ext cx="4802510" cy="1141683"/>
           </a:xfrm>
           <a:prstGeom prst="rect">
             <a:avLst/>
@@ -11663,7 +11802,7 @@
               <a:defRPr/>
             </a:pPr>
             <a:r>
-              <a:rPr lang="en-US" sz="9718" b="false" i="false" u="none" strike="noStrike" kern="0">
+              <a:rPr lang="en-US" sz="9718" b="true" i="false" u="none" strike="noStrike" kern="0">
                 <a:solidFill>
                   <a:srgbClr val="F5F7FC"/>
                 </a:solidFill>
@@ -11683,12 +11822,12 @@
         </p:nvSpPr>
         <p:spPr>
           <a:xfrm>
-            <a:off x="1204148" y="4711687"/>
-            <a:ext cx="13847704" cy="2845741"/>
+            <a:off x="1204148" y="4788536"/>
+            <a:ext cx="13847704" cy="2930596"/>
           </a:xfrm>
           <a:prstGeom prst="roundRect">
             <a:avLst>
-              <a:gd name="adj" fmla="val 13752"/>
+              <a:gd name="adj" fmla="val 13354"/>
             </a:avLst>
           </a:prstGeom>
           <a:solidFill>
@@ -11707,8 +11846,8 @@
         </p:nvCxnSpPr>
         <p:spPr>
           <a:xfrm>
-            <a:off x="1204148" y="4711687"/>
-            <a:ext cx="0" cy="2845741"/>
+            <a:off x="1204148" y="4788536"/>
+            <a:ext cx="0" cy="2930596"/>
           </a:xfrm>
           <a:prstGeom prst="line">
             <a:avLst/>
@@ -11728,8 +11867,8 @@
         </p:nvSpPr>
         <p:spPr>
           <a:xfrm>
-            <a:off x="1655704" y="5140801"/>
-            <a:ext cx="8165394" cy="556919"/>
+            <a:off x="1655704" y="5217650"/>
+            <a:ext cx="8934243" cy="556919"/>
           </a:xfrm>
           <a:prstGeom prst="rect">
             <a:avLst/>
@@ -11754,7 +11893,7 @@
               <a:defRPr/>
             </a:pPr>
             <a:r>
-              <a:rPr lang="en-US" sz="4740" b="false" i="false" u="none" strike="noStrike" kern="0">
+              <a:rPr lang="en-US" sz="4740" b="true" i="false" u="none" strike="noStrike" kern="0">
                 <a:solidFill>
                   <a:srgbClr val="F5F7FC"/>
                 </a:solidFill>
@@ -11774,7 +11913,7 @@
         </p:nvSpPr>
         <p:spPr>
           <a:xfrm>
-            <a:off x="1655704" y="5821856"/>
+            <a:off x="1655704" y="5898705"/>
             <a:ext cx="11923721" cy="389843"/>
           </a:xfrm>
           <a:prstGeom prst="rect">
@@ -11820,7 +11959,7 @@
         </p:nvSpPr>
         <p:spPr>
           <a:xfrm>
-            <a:off x="1655704" y="6229479"/>
+            <a:off x="1655704" y="6348756"/>
             <a:ext cx="12791912" cy="389843"/>
           </a:xfrm>
           <a:prstGeom prst="rect">
@@ -11866,7 +12005,7 @@
         </p:nvSpPr>
         <p:spPr>
           <a:xfrm>
-            <a:off x="1655704" y="6637102"/>
+            <a:off x="1655704" y="6798806"/>
             <a:ext cx="1687920" cy="389843"/>
           </a:xfrm>
           <a:prstGeom prst="rect">
@@ -11912,12 +12051,12 @@
         </p:nvSpPr>
         <p:spPr>
           <a:xfrm>
-            <a:off x="1204148" y="8008983"/>
-            <a:ext cx="13847704" cy="3253364"/>
+            <a:off x="1204148" y="8170687"/>
+            <a:ext cx="13847704" cy="3380646"/>
           </a:xfrm>
           <a:prstGeom prst="roundRect">
             <a:avLst>
-              <a:gd name="adj" fmla="val 12029"/>
+              <a:gd name="adj" fmla="val 11576"/>
             </a:avLst>
           </a:prstGeom>
           <a:solidFill>
@@ -11936,8 +12075,8 @@
         </p:nvCxnSpPr>
         <p:spPr>
           <a:xfrm>
-            <a:off x="1204148" y="8008983"/>
-            <a:ext cx="0" cy="3253364"/>
+            <a:off x="1204148" y="8170687"/>
+            <a:ext cx="0" cy="3380646"/>
           </a:xfrm>
           <a:prstGeom prst="line">
             <a:avLst/>
@@ -11957,8 +12096,8 @@
         </p:nvSpPr>
         <p:spPr>
           <a:xfrm>
-            <a:off x="1655704" y="8438097"/>
-            <a:ext cx="10308176" cy="556919"/>
+            <a:off x="1655704" y="8599801"/>
+            <a:ext cx="11108333" cy="556919"/>
           </a:xfrm>
           <a:prstGeom prst="rect">
             <a:avLst/>
@@ -11983,7 +12122,7 @@
               <a:defRPr/>
             </a:pPr>
             <a:r>
-              <a:rPr lang="en-US" sz="4740" b="false" i="false" u="none" strike="noStrike" kern="0">
+              <a:rPr lang="en-US" sz="4740" b="true" i="false" u="none" strike="noStrike" kern="0">
                 <a:solidFill>
                   <a:srgbClr val="F5F7FC"/>
                 </a:solidFill>
@@ -12003,7 +12142,7 @@
         </p:nvSpPr>
         <p:spPr>
           <a:xfrm>
-            <a:off x="1655704" y="9119153"/>
+            <a:off x="1655704" y="9280857"/>
             <a:ext cx="12721108" cy="389843"/>
           </a:xfrm>
           <a:prstGeom prst="rect">
@@ -12049,7 +12188,7 @@
         </p:nvSpPr>
         <p:spPr>
           <a:xfrm>
-            <a:off x="1655704" y="9526776"/>
+            <a:off x="1655704" y="9730907"/>
             <a:ext cx="12556742" cy="389843"/>
           </a:xfrm>
           <a:prstGeom prst="rect">
@@ -12095,7 +12234,7 @@
         </p:nvSpPr>
         <p:spPr>
           <a:xfrm>
-            <a:off x="1655704" y="9934399"/>
+            <a:off x="1655704" y="10180957"/>
             <a:ext cx="12906969" cy="389843"/>
           </a:xfrm>
           <a:prstGeom prst="rect">
@@ -12141,7 +12280,7 @@
         </p:nvSpPr>
         <p:spPr>
           <a:xfrm>
-            <a:off x="1655704" y="10342021"/>
+            <a:off x="1655704" y="10631008"/>
             <a:ext cx="2695190" cy="389843"/>
           </a:xfrm>
           <a:prstGeom prst="rect">
@@ -12187,12 +12326,12 @@
         </p:nvSpPr>
         <p:spPr>
           <a:xfrm>
-            <a:off x="1204148" y="11713902"/>
-            <a:ext cx="13847704" cy="2438118"/>
+            <a:off x="1204148" y="12002888"/>
+            <a:ext cx="13847704" cy="2480545"/>
           </a:xfrm>
           <a:prstGeom prst="roundRect">
             <a:avLst>
-              <a:gd name="adj" fmla="val 16051"/>
+              <a:gd name="adj" fmla="val 15777"/>
             </a:avLst>
           </a:prstGeom>
           <a:solidFill>
@@ -12211,8 +12350,8 @@
         </p:nvCxnSpPr>
         <p:spPr>
           <a:xfrm>
-            <a:off x="1204148" y="11713902"/>
-            <a:ext cx="0" cy="2438118"/>
+            <a:off x="1204148" y="12002888"/>
+            <a:ext cx="0" cy="2480545"/>
           </a:xfrm>
           <a:prstGeom prst="line">
             <a:avLst/>
@@ -12232,8 +12371,8 @@
         </p:nvSpPr>
         <p:spPr>
           <a:xfrm>
-            <a:off x="1655704" y="12143016"/>
-            <a:ext cx="8600092" cy="556919"/>
+            <a:off x="1655704" y="12432003"/>
+            <a:ext cx="9402657" cy="556919"/>
           </a:xfrm>
           <a:prstGeom prst="rect">
             <a:avLst/>
@@ -12258,7 +12397,7 @@
               <a:defRPr/>
             </a:pPr>
             <a:r>
-              <a:rPr lang="en-US" sz="4740" b="false" i="false" u="none" strike="noStrike" kern="0">
+              <a:rPr lang="en-US" sz="4740" b="true" i="false" u="none" strike="noStrike" kern="0">
                 <a:solidFill>
                   <a:srgbClr val="F5F7FC"/>
                 </a:solidFill>
@@ -12278,7 +12417,7 @@
         </p:nvSpPr>
         <p:spPr>
           <a:xfrm>
-            <a:off x="1655704" y="12824072"/>
+            <a:off x="1655704" y="13113058"/>
             <a:ext cx="10543045" cy="389843"/>
           </a:xfrm>
           <a:prstGeom prst="rect">
@@ -12324,7 +12463,7 @@
         </p:nvSpPr>
         <p:spPr>
           <a:xfrm>
-            <a:off x="1655704" y="13231695"/>
+            <a:off x="1655704" y="13563108"/>
             <a:ext cx="11737861" cy="389843"/>
           </a:xfrm>
           <a:prstGeom prst="rect">
@@ -12370,12 +12509,12 @@
         </p:nvSpPr>
         <p:spPr>
           <a:xfrm>
-            <a:off x="1204148" y="14603576"/>
-            <a:ext cx="13847704" cy="2438118"/>
+            <a:off x="1204148" y="14934989"/>
+            <a:ext cx="13847704" cy="2480545"/>
           </a:xfrm>
           <a:prstGeom prst="roundRect">
             <a:avLst>
-              <a:gd name="adj" fmla="val 16051"/>
+              <a:gd name="adj" fmla="val 15777"/>
             </a:avLst>
           </a:prstGeom>
           <a:solidFill>
@@ -12394,8 +12533,8 @@
         </p:nvCxnSpPr>
         <p:spPr>
           <a:xfrm>
-            <a:off x="1204148" y="14603576"/>
-            <a:ext cx="0" cy="2438118"/>
+            <a:off x="1204148" y="14934989"/>
+            <a:ext cx="0" cy="2480545"/>
           </a:xfrm>
           <a:prstGeom prst="line">
             <a:avLst/>
@@ -12415,8 +12554,8 @@
         </p:nvSpPr>
         <p:spPr>
           <a:xfrm>
-            <a:off x="1655704" y="15032690"/>
-            <a:ext cx="7028077" cy="556919"/>
+            <a:off x="1655704" y="15364103"/>
+            <a:ext cx="7696379" cy="556919"/>
           </a:xfrm>
           <a:prstGeom prst="rect">
             <a:avLst/>
@@ -12441,7 +12580,7 @@
               <a:defRPr/>
             </a:pPr>
             <a:r>
-              <a:rPr lang="en-US" sz="4740" b="false" i="false" u="none" strike="noStrike" kern="0">
+              <a:rPr lang="en-US" sz="4740" b="true" i="false" u="none" strike="noStrike" kern="0">
                 <a:solidFill>
                   <a:srgbClr val="F5F7FC"/>
                 </a:solidFill>
@@ -12461,7 +12600,7 @@
         </p:nvSpPr>
         <p:spPr>
           <a:xfrm>
-            <a:off x="1655704" y="15713745"/>
+            <a:off x="1655704" y="16045159"/>
             <a:ext cx="12791491" cy="389843"/>
           </a:xfrm>
           <a:prstGeom prst="rect">
@@ -12507,7 +12646,7 @@
         </p:nvSpPr>
         <p:spPr>
           <a:xfrm>
-            <a:off x="1655704" y="16121368"/>
+            <a:off x="1655704" y="16495209"/>
             <a:ext cx="11760198" cy="389843"/>
           </a:xfrm>
           <a:prstGeom prst="rect">
@@ -12647,7 +12786,7 @@
         <p:spPr>
           <a:xfrm>
             <a:off x="1204148" y="1591220"/>
-            <a:ext cx="4968381" cy="1837831"/>
+            <a:ext cx="5411447" cy="1837831"/>
           </a:xfrm>
           <a:prstGeom prst="rect">
             <a:avLst/>
@@ -12672,7 +12811,7 @@
               <a:defRPr/>
             </a:pPr>
             <a:r>
-              <a:rPr lang="en-US" sz="15644" b="false" i="false" u="none" strike="noStrike" kern="0">
+              <a:rPr lang="en-US" sz="15644" b="true" i="false" u="none" strike="noStrike" kern="0">
                 <a:solidFill>
                   <a:srgbClr val="F5F7FC"/>
                 </a:solidFill>
@@ -13315,7 +13454,7 @@
         </p:nvSpPr>
         <p:spPr>
           <a:xfrm>
-            <a:off x="1204148" y="12501846"/>
+            <a:off x="1204148" y="12529222"/>
             <a:ext cx="10270607" cy="306305"/>
           </a:xfrm>
           <a:prstGeom prst="rect">

--- a/web/showcase/pptx/flagships/default/linkedin-carousel.pptx
+++ b/web/showcase/pptx/flagships/default/linkedin-carousel.pptx
@@ -8079,7 +8079,7 @@
                 </a:solidFill>
                 <a:latin typeface="Courier New"/>
               </a:rPr>
-              <a:t>GRAPHCOMPOSE 2.1</a:t>
+              <a:t>GRAPHCOMPOSE 2.2</a:t>
             </a:r>
             <a:endParaRPr lang="en-US" sz="1100"/>
           </a:p>
@@ -9100,7 +9100,7 @@
                 </a:solidFill>
                 <a:latin typeface="Courier New"/>
               </a:rPr>
-              <a:t>WHAT 2.1 ADDS</a:t>
+              <a:t>WHAT 2.2 ADDS</a:t>
             </a:r>
             <a:endParaRPr lang="en-US" sz="1100"/>
           </a:p>

--- a/web/showcase/pptx/flagships/default/linkedin-carousel.pptx
+++ b/web/showcase/pptx/flagships/default/linkedin-carousel.pptx
@@ -8079,7 +8079,7 @@
                 </a:solidFill>
                 <a:latin typeface="Courier New"/>
               </a:rPr>
-              <a:t>GRAPHCOMPOSE 2.2</a:t>
+              <a:t>GRAPHCOMPOSE 2.3</a:t>
             </a:r>
             <a:endParaRPr lang="en-US" sz="1100"/>
           </a:p>
@@ -9100,7 +9100,7 @@
                 </a:solidFill>
                 <a:latin typeface="Courier New"/>
               </a:rPr>
-              <a:t>WHAT 2.2 ADDS</a:t>
+              <a:t>WHAT 2.3 ADDS</a:t>
             </a:r>
             <a:endParaRPr lang="en-US" sz="1100"/>
           </a:p>
